--- a/Planning docs/Slides/lesson-3-3-teacher-slides.pptx
+++ b/Planning docs/Slides/lesson-3-3-teacher-slides.pptx
@@ -4858,7 +4858,7 @@
                 <a:ea typeface="Calibri" pitchFamily="34" charset="-122"/>
                 <a:cs typeface="Calibri" pitchFamily="34" charset="-120"/>
               </a:rPr>
-              <a:t>•  Arthur cries and asks Stanley to tell him what’s wrong. What does this scene tell you about Arthur as a brother?</a:t>
+              <a:t>•  Stop when Arthur kneels by Stanley’s bed in the dark and Stanley says, “Go away.” Stanley has been cheerful since the first page. Name the events that changed him, and say which one you think mattered most .</a:t>
             </a:r>
             <a:endParaRPr lang="en-US" sz="1500" dirty="0"/>
           </a:p>
@@ -6334,7 +6334,7 @@
                 <a:ea typeface="Calibri" pitchFamily="34" charset="-122"/>
                 <a:cs typeface="Calibri" pitchFamily="34" charset="-120"/>
               </a:rPr>
-              <a:t>Arthur cries and asks Stanley to tell him what’s wrong. What does this scene tell you about Arthur as a brother?</a:t>
+              <a:t>Stop when Arthur kneels by Stanley’s bed in the dark and Stanley says, “Go away.” Stanley has been cheerful since the first page. Name the events that changed him, and say which one you think mattered most .</a:t>
             </a:r>
             <a:endParaRPr lang="en-US" sz="1700" dirty="0"/>
           </a:p>
